--- a/assets/pptx/catalog-711.pptx
+++ b/assets/pptx/catalog-711.pptx
@@ -3286,7 +3286,7 @@
                 <a:ea typeface="Ebrima"/>
                 <a:cs typeface="Ebrima"/>
               </a:rPr>
-              <a:t>ክብር ይሁን ክብር (2x)</a:t>
+              <a:t>ክብር ይሁን ክብር 2x</a:t>
             </a:r>
           </a:p>
         </p:txBody>
@@ -3353,7 +3353,7 @@
                 <a:ea typeface="Ebrima"/>
                 <a:cs typeface="Ebrima"/>
               </a:rPr>
-              <a:t>ክብር ይሁን ክብር (12x)</a:t>
+              <a:t>ክብር ይሁን ክብር 12x</a:t>
             </a:r>
           </a:p>
         </p:txBody>
@@ -3492,7 +3492,7 @@
                 <a:ea typeface="Ebrima"/>
                 <a:cs typeface="Ebrima"/>
               </a:rPr>
-              <a:t>ስለዚህ ስለዚህ አመሰግንሃለሁ (2x)</a:t>
+              <a:t>ስለዚህ ስለዚህ አመሰግንሃለሁ 2x</a:t>
             </a:r>
           </a:p>
         </p:txBody>
@@ -3595,7 +3595,7 @@
                 <a:ea typeface="Ebrima"/>
                 <a:cs typeface="Ebrima"/>
               </a:rPr>
-              <a:t>ጌታዬ አንተን ይዣለሁ (2x)</a:t>
+              <a:t>ጌታዬ አንተን ይዣለሁ 2x</a:t>
             </a:r>
           </a:p>
         </p:txBody>
@@ -3716,7 +3716,7 @@
                 <a:ea typeface="Ebrima"/>
                 <a:cs typeface="Ebrima"/>
               </a:rPr>
-              <a:t>እውነትህ ነው አዕምሮዬን ተቆጣጠረኝ (2x)</a:t>
+              <a:t>እውነትህ ነው አዕምሮዬን ተቆጣጠረኝ 2x</a:t>
             </a:r>
           </a:p>
         </p:txBody>
@@ -3837,7 +3837,7 @@
                 <a:ea typeface="Ebrima"/>
                 <a:cs typeface="Ebrima"/>
               </a:rPr>
-              <a:t>ስለዚህ ስለዚህ አመሰግንሃለሁ (2x)</a:t>
+              <a:t>ስለዚህ ስለዚህ አመሰግንሃለሁ 2x</a:t>
             </a:r>
           </a:p>
         </p:txBody>
@@ -3958,7 +3958,7 @@
                 <a:ea typeface="Ebrima"/>
                 <a:cs typeface="Ebrima"/>
               </a:rPr>
-              <a:t>እውነትህ ነው አዕምሮዬን ተቆጣጠረኝ (2x)</a:t>
+              <a:t>እውነትህ ነው አዕምሮዬን ተቆጣጠረኝ 2x</a:t>
             </a:r>
           </a:p>
         </p:txBody>
@@ -4079,7 +4079,7 @@
                 <a:ea typeface="Ebrima"/>
                 <a:cs typeface="Ebrima"/>
               </a:rPr>
-              <a:t>እውነትህ ነው አዕምሮዬን ተቆጣጠረኝ (2x)</a:t>
+              <a:t>እውነትህ ነው አዕምሮዬን ተቆጣጠረኝ 2x</a:t>
             </a:r>
           </a:p>
         </p:txBody>
@@ -4200,7 +4200,7 @@
                 <a:ea typeface="Ebrima"/>
                 <a:cs typeface="Ebrima"/>
               </a:rPr>
-              <a:t>ጌታን ስለያዘው አያሰጥመውም አለው (2x)</a:t>
+              <a:t>ጌታን ስለያዘው አያሰጥመውም አለው 2x</a:t>
             </a:r>
           </a:p>
         </p:txBody>
@@ -4303,7 +4303,7 @@
                 <a:ea typeface="Ebrima"/>
                 <a:cs typeface="Ebrima"/>
               </a:rPr>
-              <a:t>ክብር ይሁን ክብር (4x)</a:t>
+              <a:t>ክብር ይሁን ክብር 4x</a:t>
             </a:r>
           </a:p>
         </p:txBody>
